--- a/dist/초5/국어/독서와추론/초5_국어_독서와추론_01_단서로추론하기_학생용.pptx
+++ b/dist/초5/국어/독서와추론/초5_국어_독서와추론_01_단서로추론하기_학생용.pptx
@@ -119,13 +119,13 @@
   <p:extLst>
     <p:ext uri="{521415D9-36F7-43E2-AB2F-B90AF26B5E84}">
       <p14:sectionLst xmlns:p14="http://schemas.microsoft.com/office/powerpoint/2010/main">
-        <p14:section name="도입" id="{e9f478e3-0ce4-7bde-7794-cc1fa0e1f8d1}">
+        <p14:section name="도입" id="{53b5d7b1-89d5-6c3c-2b28-5ed36d301b1c}">
           <p14:sldIdLst>
             <p14:sldId id="256"/>
             <p14:sldId id="257"/>
           </p14:sldIdLst>
         </p14:section>
-        <p14:section name="개념" id="{aaab6453-bcb4-0990-9a2c-0d36273f421f}">
+        <p14:section name="개념" id="{73433742-884a-4c10-a8a0-77a9c2d01479}">
           <p14:sldIdLst>
             <p14:sldId id="258"/>
             <p14:sldId id="259"/>
@@ -133,25 +133,25 @@
             <p14:sldId id="261"/>
           </p14:sldIdLst>
         </p14:section>
-        <p14:section name="연습" id="{e3e5263b-ff42-6bed-f2c3-87cb4bbf126a}">
+        <p14:section name="연습" id="{477a63e6-819b-9e31-8469-9edd961601cc}">
           <p14:sldIdLst>
             <p14:sldId id="262"/>
             <p14:sldId id="263"/>
             <p14:sldId id="264"/>
           </p14:sldIdLst>
         </p14:section>
-        <p14:section name="확인" id="{0637fa0d-1ba7-a9ec-6f48-74eae89331a5}">
+        <p14:section name="확인" id="{64b8a7b9-4d4f-9c47-774d-8068ace330e5}">
           <p14:sldIdLst>
             <p14:sldId id="265"/>
             <p14:sldId id="266"/>
           </p14:sldIdLst>
         </p14:section>
-        <p14:section name="정리" id="{cc308fe2-33af-9205-1987-e3730b8159ed}">
+        <p14:section name="정리" id="{1b23a4e8-b793-547d-a384-0a2186b2dc38}">
           <p14:sldIdLst>
             <p14:sldId id="267"/>
           </p14:sldIdLst>
         </p14:section>
-        <p14:section name="보충" id="{4766cbd0-a379-58a5-0770-c35d0051003c}">
+        <p14:section name="보충" id="{4778dfeb-b623-7416-ecbb-2b95bad2cfdf}">
           <p14:sldIdLst>
             <p14:sldId id="268"/>
           </p14:sldIdLst>
